--- a/weekly_presentations/week09_backtesting_taker_milestone3.pptx
+++ b/weekly_presentations/week09_backtesting_taker_milestone3.pptx
@@ -14,6 +14,7 @@
     <p:sldId id="262" r:id="rId13"/>
     <p:sldId id="263" r:id="rId14"/>
     <p:sldId id="264" r:id="rId15"/>
+    <p:sldId id="265" r:id="rId16"/>
   </p:sldIdLst>
   <p:sldSz cx="12191695" cy="6858000" type="screen4x3"/>
   <p:notesSz cx="6858000" cy="9144000"/>
@@ -3250,6 +3251,164 @@
 </p:sld>
 </file>
 
+<file path=ppt/slides/slide10.xml><?xml version="1.0" encoding="utf-8"?>
+<p:sld xmlns:a="http://schemas.openxmlformats.org/drawingml/2006/main" xmlns:p="http://schemas.openxmlformats.org/presentationml/2006/main" xmlns:r="http://schemas.openxmlformats.org/officeDocument/2006/relationships">
+  <p:cSld>
+    <p:spTree>
+      <p:nvGrpSpPr>
+        <p:cNvPr id="1" name=""/>
+        <p:cNvGrpSpPr/>
+        <p:nvPr/>
+      </p:nvGrpSpPr>
+      <p:grpSpPr/>
+      <p:pic>
+        <p:nvPicPr>
+          <p:cNvPr id="2" name="Picture 1" descr="ncsu_logo.png"/>
+          <p:cNvPicPr>
+            <a:picLocks noChangeAspect="1"/>
+          </p:cNvPicPr>
+          <p:nvPr/>
+        </p:nvPicPr>
+        <p:blipFill>
+          <a:blip r:embed="rId2"/>
+          <a:stretch>
+            <a:fillRect/>
+          </a:stretch>
+        </p:blipFill>
+        <p:spPr>
+          <a:xfrm>
+            <a:off x="9784080" y="274320"/>
+            <a:ext cx="2011680" cy="316653"/>
+          </a:xfrm>
+          <a:prstGeom prst="rect">
+            <a:avLst/>
+          </a:prstGeom>
+        </p:spPr>
+      </p:pic>
+      <p:sp>
+        <p:nvSpPr>
+          <p:cNvPr id="3" name="TextBox 2"/>
+          <p:cNvSpPr txBox="1"/>
+          <p:nvPr/>
+        </p:nvSpPr>
+        <p:spPr>
+          <a:xfrm>
+            <a:off x="457200" y="457200"/>
+            <a:ext cx="8961120" cy="822960"/>
+          </a:xfrm>
+          <a:prstGeom prst="rect">
+            <a:avLst/>
+          </a:prstGeom>
+          <a:noFill/>
+        </p:spPr>
+        <p:txBody>
+          <a:bodyPr wrap="square">
+            <a:spAutoFit/>
+          </a:bodyPr>
+          <a:lstStyle/>
+          <a:p>
+            <a:r>
+              <a:rPr sz="2400" b="1" i="0">
+                <a:solidFill>
+                  <a:srgbClr val="990000"/>
+                </a:solidFill>
+                <a:latin typeface="Arial"/>
+              </a:rPr>
+              <a:t>Reading</a:t>
+            </a:r>
+          </a:p>
+        </p:txBody>
+      </p:sp>
+      <p:sp>
+        <p:nvSpPr>
+          <p:cNvPr id="4" name="Rectangle 3"/>
+          <p:cNvSpPr/>
+          <p:nvPr/>
+        </p:nvSpPr>
+        <p:spPr>
+          <a:xfrm>
+            <a:off x="457200" y="1371600"/>
+            <a:ext cx="11247120" cy="27940"/>
+          </a:xfrm>
+          <a:prstGeom prst="rect">
+            <a:avLst/>
+          </a:prstGeom>
+          <a:solidFill>
+            <a:srgbClr val="CC0000"/>
+          </a:solidFill>
+          <a:ln>
+            <a:noFill/>
+          </a:ln>
+        </p:spPr>
+        <p:style>
+          <a:lnRef idx="1">
+            <a:schemeClr val="accent1"/>
+          </a:lnRef>
+          <a:fillRef idx="3">
+            <a:schemeClr val="accent1"/>
+          </a:fillRef>
+          <a:effectRef idx="2">
+            <a:schemeClr val="accent1"/>
+          </a:effectRef>
+          <a:fontRef idx="minor">
+            <a:schemeClr val="lt1"/>
+          </a:fontRef>
+        </p:style>
+        <p:txBody>
+          <a:bodyPr rtlCol="0" anchor="ctr"/>
+          <a:lstStyle/>
+          <a:p>
+            <a:pPr algn="ctr"/>
+          </a:p>
+        </p:txBody>
+      </p:sp>
+      <p:sp>
+        <p:nvSpPr>
+          <p:cNvPr id="5" name="TextBox 4"/>
+          <p:cNvSpPr txBox="1"/>
+          <p:nvPr/>
+        </p:nvSpPr>
+        <p:spPr>
+          <a:xfrm>
+            <a:off x="640080" y="1600200"/>
+            <a:ext cx="10972800" cy="4937760"/>
+          </a:xfrm>
+          <a:prstGeom prst="rect">
+            <a:avLst/>
+          </a:prstGeom>
+          <a:noFill/>
+        </p:spPr>
+        <p:txBody>
+          <a:bodyPr wrap="square">
+            <a:spAutoFit/>
+          </a:bodyPr>
+          <a:lstStyle/>
+          <a:p>
+            <a:pPr>
+              <a:spcAft>
+                <a:spcPts val="800"/>
+              </a:spcAft>
+            </a:pPr>
+            <a:r>
+              <a:rPr sz="1700" b="0" i="0">
+                <a:solidFill>
+                  <a:srgbClr val="1A1A1A"/>
+                </a:solidFill>
+                <a:latin typeface="Arial"/>
+              </a:rPr>
+              <a:t>•  Cartea et al., Ch. 10-11; Bailey-Lopez de Prado (2014); Lopez de Prado (2018)</a:t>
+            </a:r>
+          </a:p>
+        </p:txBody>
+      </p:sp>
+    </p:spTree>
+  </p:cSld>
+  <p:clrMapOvr>
+    <a:masterClrMapping/>
+  </p:clrMapOvr>
+</p:sld>
+</file>
+
 <file path=ppt/slides/slide2.xml><?xml version="1.0" encoding="utf-8"?>
 <p:sld xmlns:a="http://schemas.openxmlformats.org/drawingml/2006/main" xmlns:p="http://schemas.openxmlformats.org/presentationml/2006/main" xmlns:r="http://schemas.openxmlformats.org/officeDocument/2006/relationships">
   <p:cSld>
@@ -4739,7 +4898,7 @@
           <a:noFill/>
         </p:spPr>
         <p:txBody>
-          <a:bodyPr wrap="square">
+          <a:bodyPr wrap="none">
             <a:spAutoFit/>
           </a:bodyPr>
           <a:lstStyle/>
@@ -4751,7 +4910,7 @@
                 </a:solidFill>
                 <a:latin typeface="Arial"/>
               </a:rPr>
-              <a:t>Reading</a:t>
+              <a:t>Glossary — Key Terms</a:t>
             </a:r>
           </a:p>
         </p:txBody>
@@ -4823,17 +4982,176 @@
           <a:p>
             <a:pPr>
               <a:spcAft>
-                <a:spcPts val="800"/>
+                <a:spcPts val="700"/>
               </a:spcAft>
             </a:pPr>
             <a:r>
-              <a:rPr sz="1700" b="0" i="0">
+              <a:rPr sz="1500" b="1" i="0">
+                <a:solidFill>
+                  <a:srgbClr val="CC0000"/>
+                </a:solidFill>
+                <a:latin typeface="Arial"/>
+              </a:rPr>
+              <a:t>Event-driven backtest — </a:t>
+            </a:r>
+            <a:r>
+              <a:rPr sz="1500" b="0" i="0">
                 <a:solidFill>
                   <a:srgbClr val="1A1A1A"/>
                 </a:solidFill>
                 <a:latin typeface="Arial"/>
               </a:rPr>
-              <a:t>•  Cartea et al., Ch. 10-11; Bailey-Lopez de Prado (2014); Lopez de Prado (2018)</a:t>
+              <a:t>a simulation that replays timestamped events in order</a:t>
+            </a:r>
+          </a:p>
+          <a:p>
+            <a:pPr>
+              <a:spcAft>
+                <a:spcPts val="700"/>
+              </a:spcAft>
+            </a:pPr>
+            <a:r>
+              <a:rPr sz="1500" b="1" i="0">
+                <a:solidFill>
+                  <a:srgbClr val="CC0000"/>
+                </a:solidFill>
+                <a:latin typeface="Arial"/>
+              </a:rPr>
+              <a:t>Deterministic replay — </a:t>
+            </a:r>
+            <a:r>
+              <a:rPr sz="1500" b="0" i="0">
+                <a:solidFill>
+                  <a:srgbClr val="1A1A1A"/>
+                </a:solidFill>
+                <a:latin typeface="Arial"/>
+              </a:rPr>
+              <a:t>bitwise-identical results on re-run</a:t>
+            </a:r>
+          </a:p>
+          <a:p>
+            <a:pPr>
+              <a:spcAft>
+                <a:spcPts val="700"/>
+              </a:spcAft>
+            </a:pPr>
+            <a:r>
+              <a:rPr sz="1500" b="1" i="0">
+                <a:solidFill>
+                  <a:srgbClr val="CC0000"/>
+                </a:solidFill>
+                <a:latin typeface="Arial"/>
+              </a:rPr>
+              <a:t>Look-ahead bias — </a:t>
+            </a:r>
+            <a:r>
+              <a:rPr sz="1500" b="0" i="0">
+                <a:solidFill>
+                  <a:srgbClr val="1A1A1A"/>
+                </a:solidFill>
+                <a:latin typeface="Arial"/>
+              </a:rPr>
+              <a:t>using information not available at decision time</a:t>
+            </a:r>
+          </a:p>
+          <a:p>
+            <a:pPr>
+              <a:spcAft>
+                <a:spcPts val="700"/>
+              </a:spcAft>
+            </a:pPr>
+            <a:r>
+              <a:rPr sz="1500" b="1" i="0">
+                <a:solidFill>
+                  <a:srgbClr val="CC0000"/>
+                </a:solidFill>
+                <a:latin typeface="Arial"/>
+              </a:rPr>
+              <a:t>Sharpe ratio — </a:t>
+            </a:r>
+            <a:r>
+              <a:rPr sz="1500" b="0" i="0">
+                <a:solidFill>
+                  <a:srgbClr val="1A1A1A"/>
+                </a:solidFill>
+                <a:latin typeface="Arial"/>
+              </a:rPr>
+              <a:t>risk-adjusted return: annualized mean over standard deviation</a:t>
+            </a:r>
+          </a:p>
+          <a:p>
+            <a:pPr>
+              <a:spcAft>
+                <a:spcPts val="700"/>
+              </a:spcAft>
+            </a:pPr>
+            <a:r>
+              <a:rPr sz="1500" b="1" i="0">
+                <a:solidFill>
+                  <a:srgbClr val="CC0000"/>
+                </a:solidFill>
+                <a:latin typeface="Arial"/>
+              </a:rPr>
+              <a:t>Block bootstrap — </a:t>
+            </a:r>
+            <a:r>
+              <a:rPr sz="1500" b="0" i="0">
+                <a:solidFill>
+                  <a:srgbClr val="1A1A1A"/>
+                </a:solidFill>
+                <a:latin typeface="Arial"/>
+              </a:rPr>
+              <a:t>resampling blocks of returns for a CI that keeps autocorrelation</a:t>
+            </a:r>
+          </a:p>
+          <a:p>
+            <a:pPr>
+              <a:spcAft>
+                <a:spcPts val="700"/>
+              </a:spcAft>
+            </a:pPr>
+            <a:r>
+              <a:rPr sz="1500" b="1" i="0">
+                <a:solidFill>
+                  <a:srgbClr val="CC0000"/>
+                </a:solidFill>
+                <a:latin typeface="Arial"/>
+              </a:rPr>
+              <a:t>Maximum drawdown — </a:t>
+            </a:r>
+            <a:r>
+              <a:rPr sz="1500" b="0" i="0">
+                <a:solidFill>
+                  <a:srgbClr val="1A1A1A"/>
+                </a:solidFill>
+                <a:latin typeface="Arial"/>
+              </a:rPr>
+              <a:t>the largest peak-to-trough decline in equity</a:t>
+            </a:r>
+          </a:p>
+          <a:p>
+            <a:pPr>
+              <a:spcAft>
+                <a:spcPts val="700"/>
+              </a:spcAft>
+            </a:pPr>
+            <a:r>
+              <a:rPr sz="1500" b="1" i="0">
+                <a:solidFill>
+                  <a:srgbClr val="CC0000"/>
+                </a:solidFill>
+                <a:latin typeface="Arial"/>
+              </a:rPr>
+              <a:t>Taker strategy — </a:t>
+            </a:r>
+            <a:r>
+              <a:rPr sz="1500" b="0" i="0">
+                <a:solidFill>
+                  <a:srgbClr val="1A1A1A"/>
+                </a:solidFill>
+                <a:latin typeface="Arial"/>
+              </a:rPr>
+              <a:t>aggressive, spread-crossing execution</a:t>
             </a:r>
           </a:p>
         </p:txBody>

--- a/weekly_presentations/week09_backtesting_taker_milestone3.pptx
+++ b/weekly_presentations/week09_backtesting_taker_milestone3.pptx
@@ -15,6 +15,7 @@
     <p:sldId id="263" r:id="rId14"/>
     <p:sldId id="264" r:id="rId15"/>
     <p:sldId id="265" r:id="rId16"/>
+    <p:sldId id="266" r:id="rId17"/>
   </p:sldIdLst>
   <p:sldSz cx="12191695" cy="6858000" type="screen4x3"/>
   <p:notesSz cx="6858000" cy="9144000"/>
@@ -3397,6 +3398,212 @@
                 <a:latin typeface="Arial"/>
               </a:rPr>
               <a:t>•  Cartea et al., Ch. 10-11; Bailey-Lopez de Prado (2014); Lopez de Prado (2018)</a:t>
+            </a:r>
+          </a:p>
+        </p:txBody>
+      </p:sp>
+    </p:spTree>
+  </p:cSld>
+  <p:clrMapOvr>
+    <a:masterClrMapping/>
+  </p:clrMapOvr>
+</p:sld>
+</file>
+
+<file path=ppt/slides/slide11.xml><?xml version="1.0" encoding="utf-8"?>
+<p:sld xmlns:a="http://schemas.openxmlformats.org/drawingml/2006/main" xmlns:p="http://schemas.openxmlformats.org/presentationml/2006/main" xmlns:r="http://schemas.openxmlformats.org/officeDocument/2006/relationships">
+  <p:cSld>
+    <p:spTree>
+      <p:nvGrpSpPr>
+        <p:cNvPr id="1" name=""/>
+        <p:cNvGrpSpPr/>
+        <p:nvPr/>
+      </p:nvGrpSpPr>
+      <p:grpSpPr/>
+      <p:pic>
+        <p:nvPicPr>
+          <p:cNvPr id="2" name="Picture 1" descr="ncsu_logo.png"/>
+          <p:cNvPicPr>
+            <a:picLocks noChangeAspect="1"/>
+          </p:cNvPicPr>
+          <p:nvPr/>
+        </p:nvPicPr>
+        <p:blipFill>
+          <a:blip r:embed="rId2"/>
+          <a:stretch>
+            <a:fillRect/>
+          </a:stretch>
+        </p:blipFill>
+        <p:spPr>
+          <a:xfrm>
+            <a:off x="9784080" y="274320"/>
+            <a:ext cx="2011680" cy="316653"/>
+          </a:xfrm>
+          <a:prstGeom prst="rect">
+            <a:avLst/>
+          </a:prstGeom>
+        </p:spPr>
+      </p:pic>
+      <p:sp>
+        <p:nvSpPr>
+          <p:cNvPr id="3" name="TextBox 2"/>
+          <p:cNvSpPr txBox="1"/>
+          <p:nvPr/>
+        </p:nvSpPr>
+        <p:spPr>
+          <a:xfrm>
+            <a:off x="457200" y="457200"/>
+            <a:ext cx="8961120" cy="822960"/>
+          </a:xfrm>
+          <a:prstGeom prst="rect">
+            <a:avLst/>
+          </a:prstGeom>
+          <a:noFill/>
+        </p:spPr>
+        <p:txBody>
+          <a:bodyPr wrap="square">
+            <a:spAutoFit/>
+          </a:bodyPr>
+          <a:lstStyle/>
+          <a:p>
+            <a:r>
+              <a:rPr sz="2400" b="1" i="0">
+                <a:solidFill>
+                  <a:srgbClr val="990000"/>
+                </a:solidFill>
+                <a:latin typeface="Arial"/>
+              </a:rPr>
+              <a:t>References</a:t>
+            </a:r>
+          </a:p>
+        </p:txBody>
+      </p:sp>
+      <p:sp>
+        <p:nvSpPr>
+          <p:cNvPr id="4" name="Rectangle 3"/>
+          <p:cNvSpPr/>
+          <p:nvPr/>
+        </p:nvSpPr>
+        <p:spPr>
+          <a:xfrm>
+            <a:off x="457200" y="1371600"/>
+            <a:ext cx="11247120" cy="27940"/>
+          </a:xfrm>
+          <a:prstGeom prst="rect">
+            <a:avLst/>
+          </a:prstGeom>
+          <a:solidFill>
+            <a:srgbClr val="CC0000"/>
+          </a:solidFill>
+          <a:ln>
+            <a:noFill/>
+          </a:ln>
+        </p:spPr>
+        <p:style>
+          <a:lnRef idx="1">
+            <a:schemeClr val="accent1"/>
+          </a:lnRef>
+          <a:fillRef idx="3">
+            <a:schemeClr val="accent1"/>
+          </a:fillRef>
+          <a:effectRef idx="2">
+            <a:schemeClr val="accent1"/>
+          </a:effectRef>
+          <a:fontRef idx="minor">
+            <a:schemeClr val="lt1"/>
+          </a:fontRef>
+        </p:style>
+        <p:txBody>
+          <a:bodyPr rtlCol="0" anchor="ctr"/>
+          <a:lstStyle/>
+          <a:p>
+            <a:pPr algn="ctr"/>
+          </a:p>
+        </p:txBody>
+      </p:sp>
+      <p:sp>
+        <p:nvSpPr>
+          <p:cNvPr id="5" name="TextBox 4"/>
+          <p:cNvSpPr txBox="1"/>
+          <p:nvPr/>
+        </p:nvSpPr>
+        <p:spPr>
+          <a:xfrm>
+            <a:off x="640080" y="1600200"/>
+            <a:ext cx="10972800" cy="4937760"/>
+          </a:xfrm>
+          <a:prstGeom prst="rect">
+            <a:avLst/>
+          </a:prstGeom>
+          <a:noFill/>
+        </p:spPr>
+        <p:txBody>
+          <a:bodyPr wrap="square">
+            <a:spAutoFit/>
+          </a:bodyPr>
+          <a:lstStyle/>
+          <a:p>
+            <a:pPr>
+              <a:spcAft>
+                <a:spcPts val="500"/>
+              </a:spcAft>
+            </a:pPr>
+            <a:r>
+              <a:rPr sz="1200" b="0" i="0">
+                <a:solidFill>
+                  <a:srgbClr val="1A1A1A"/>
+                </a:solidFill>
+                <a:latin typeface="Arial"/>
+              </a:rPr>
+              <a:t>•  Cartea, Jaikumar, &amp; Penalva (2015). Algorithmic and High-Frequency Trading, Ch. 10-11.</a:t>
+            </a:r>
+          </a:p>
+          <a:p>
+            <a:pPr>
+              <a:spcAft>
+                <a:spcPts val="500"/>
+              </a:spcAft>
+            </a:pPr>
+            <a:r>
+              <a:rPr sz="1200" b="0" i="0">
+                <a:solidFill>
+                  <a:srgbClr val="1A1A1A"/>
+                </a:solidFill>
+                <a:latin typeface="Arial"/>
+              </a:rPr>
+              <a:t>•  Bailey, D. H., &amp; Lopez de Prado, M. (2014). The deflated Sharpe ratio. Journal of Portfolio Management, 40(5), 94-107.</a:t>
+            </a:r>
+          </a:p>
+          <a:p>
+            <a:pPr>
+              <a:spcAft>
+                <a:spcPts val="500"/>
+              </a:spcAft>
+            </a:pPr>
+            <a:r>
+              <a:rPr sz="1200" b="0" i="0">
+                <a:solidFill>
+                  <a:srgbClr val="1A1A1A"/>
+                </a:solidFill>
+                <a:latin typeface="Arial"/>
+              </a:rPr>
+              <a:t>•  Lopez de Prado, M. (2018). Advances in Financial Machine Learning. Wiley.</a:t>
+            </a:r>
+          </a:p>
+          <a:p>
+            <a:pPr>
+              <a:spcAft>
+                <a:spcPts val="500"/>
+              </a:spcAft>
+            </a:pPr>
+            <a:r>
+              <a:rPr sz="1200" b="0" i="0">
+                <a:solidFill>
+                  <a:srgbClr val="1A1A1A"/>
+                </a:solidFill>
+                <a:latin typeface="Arial"/>
+              </a:rPr>
+              <a:t>•  Coincall API documentation. https://docs.coincall.com/</a:t>
             </a:r>
           </a:p>
         </p:txBody>

--- a/weekly_presentations/week09_backtesting_taker_milestone3.pptx
+++ b/weekly_presentations/week09_backtesting_taker_milestone3.pptx
@@ -16,6 +16,7 @@
     <p:sldId id="264" r:id="rId15"/>
     <p:sldId id="265" r:id="rId16"/>
     <p:sldId id="266" r:id="rId17"/>
+    <p:sldId id="267" r:id="rId18"/>
   </p:sldIdLst>
   <p:sldSz cx="12191695" cy="6858000" type="screen4x3"/>
   <p:notesSz cx="6858000" cy="9144000"/>
@@ -3303,7 +3304,7 @@
           <a:noFill/>
         </p:spPr>
         <p:txBody>
-          <a:bodyPr wrap="square">
+          <a:bodyPr wrap="none">
             <a:spAutoFit/>
           </a:bodyPr>
           <a:lstStyle/>
@@ -3315,7 +3316,7 @@
                 </a:solidFill>
                 <a:latin typeface="Arial"/>
               </a:rPr>
-              <a:t>Reading</a:t>
+              <a:t>Glossary — Key Terms</a:t>
             </a:r>
           </a:p>
         </p:txBody>
@@ -3387,17 +3388,176 @@
           <a:p>
             <a:pPr>
               <a:spcAft>
-                <a:spcPts val="800"/>
+                <a:spcPts val="700"/>
               </a:spcAft>
             </a:pPr>
             <a:r>
-              <a:rPr sz="1700" b="0" i="0">
+              <a:rPr sz="1500" b="1" i="0">
+                <a:solidFill>
+                  <a:srgbClr val="CC0000"/>
+                </a:solidFill>
+                <a:latin typeface="Arial"/>
+              </a:rPr>
+              <a:t>Event-driven backtest — </a:t>
+            </a:r>
+            <a:r>
+              <a:rPr sz="1500" b="0" i="0">
                 <a:solidFill>
                   <a:srgbClr val="1A1A1A"/>
                 </a:solidFill>
                 <a:latin typeface="Arial"/>
               </a:rPr>
-              <a:t>•  Cartea et al., Ch. 10-11; Bailey-Lopez de Prado (2014); Lopez de Prado (2018)</a:t>
+              <a:t>a simulation that replays timestamped events in order</a:t>
+            </a:r>
+          </a:p>
+          <a:p>
+            <a:pPr>
+              <a:spcAft>
+                <a:spcPts val="700"/>
+              </a:spcAft>
+            </a:pPr>
+            <a:r>
+              <a:rPr sz="1500" b="1" i="0">
+                <a:solidFill>
+                  <a:srgbClr val="CC0000"/>
+                </a:solidFill>
+                <a:latin typeface="Arial"/>
+              </a:rPr>
+              <a:t>Deterministic replay — </a:t>
+            </a:r>
+            <a:r>
+              <a:rPr sz="1500" b="0" i="0">
+                <a:solidFill>
+                  <a:srgbClr val="1A1A1A"/>
+                </a:solidFill>
+                <a:latin typeface="Arial"/>
+              </a:rPr>
+              <a:t>bitwise-identical results on re-run</a:t>
+            </a:r>
+          </a:p>
+          <a:p>
+            <a:pPr>
+              <a:spcAft>
+                <a:spcPts val="700"/>
+              </a:spcAft>
+            </a:pPr>
+            <a:r>
+              <a:rPr sz="1500" b="1" i="0">
+                <a:solidFill>
+                  <a:srgbClr val="CC0000"/>
+                </a:solidFill>
+                <a:latin typeface="Arial"/>
+              </a:rPr>
+              <a:t>Look-ahead bias — </a:t>
+            </a:r>
+            <a:r>
+              <a:rPr sz="1500" b="0" i="0">
+                <a:solidFill>
+                  <a:srgbClr val="1A1A1A"/>
+                </a:solidFill>
+                <a:latin typeface="Arial"/>
+              </a:rPr>
+              <a:t>using information not available at decision time</a:t>
+            </a:r>
+          </a:p>
+          <a:p>
+            <a:pPr>
+              <a:spcAft>
+                <a:spcPts val="700"/>
+              </a:spcAft>
+            </a:pPr>
+            <a:r>
+              <a:rPr sz="1500" b="1" i="0">
+                <a:solidFill>
+                  <a:srgbClr val="CC0000"/>
+                </a:solidFill>
+                <a:latin typeface="Arial"/>
+              </a:rPr>
+              <a:t>Sharpe ratio — </a:t>
+            </a:r>
+            <a:r>
+              <a:rPr sz="1500" b="0" i="0">
+                <a:solidFill>
+                  <a:srgbClr val="1A1A1A"/>
+                </a:solidFill>
+                <a:latin typeface="Arial"/>
+              </a:rPr>
+              <a:t>risk-adjusted return: annualized mean over standard deviation</a:t>
+            </a:r>
+          </a:p>
+          <a:p>
+            <a:pPr>
+              <a:spcAft>
+                <a:spcPts val="700"/>
+              </a:spcAft>
+            </a:pPr>
+            <a:r>
+              <a:rPr sz="1500" b="1" i="0">
+                <a:solidFill>
+                  <a:srgbClr val="CC0000"/>
+                </a:solidFill>
+                <a:latin typeface="Arial"/>
+              </a:rPr>
+              <a:t>Block bootstrap — </a:t>
+            </a:r>
+            <a:r>
+              <a:rPr sz="1500" b="0" i="0">
+                <a:solidFill>
+                  <a:srgbClr val="1A1A1A"/>
+                </a:solidFill>
+                <a:latin typeface="Arial"/>
+              </a:rPr>
+              <a:t>resampling blocks of returns for a CI that keeps autocorrelation</a:t>
+            </a:r>
+          </a:p>
+          <a:p>
+            <a:pPr>
+              <a:spcAft>
+                <a:spcPts val="700"/>
+              </a:spcAft>
+            </a:pPr>
+            <a:r>
+              <a:rPr sz="1500" b="1" i="0">
+                <a:solidFill>
+                  <a:srgbClr val="CC0000"/>
+                </a:solidFill>
+                <a:latin typeface="Arial"/>
+              </a:rPr>
+              <a:t>Maximum drawdown — </a:t>
+            </a:r>
+            <a:r>
+              <a:rPr sz="1500" b="0" i="0">
+                <a:solidFill>
+                  <a:srgbClr val="1A1A1A"/>
+                </a:solidFill>
+                <a:latin typeface="Arial"/>
+              </a:rPr>
+              <a:t>the largest peak-to-trough decline in equity</a:t>
+            </a:r>
+          </a:p>
+          <a:p>
+            <a:pPr>
+              <a:spcAft>
+                <a:spcPts val="700"/>
+              </a:spcAft>
+            </a:pPr>
+            <a:r>
+              <a:rPr sz="1500" b="1" i="0">
+                <a:solidFill>
+                  <a:srgbClr val="CC0000"/>
+                </a:solidFill>
+                <a:latin typeface="Arial"/>
+              </a:rPr>
+              <a:t>Taker strategy — </a:t>
+            </a:r>
+            <a:r>
+              <a:rPr sz="1500" b="0" i="0">
+                <a:solidFill>
+                  <a:srgbClr val="1A1A1A"/>
+                </a:solidFill>
+                <a:latin typeface="Arial"/>
+              </a:rPr>
+              <a:t>aggressive, spread-crossing execution</a:t>
             </a:r>
           </a:p>
         </p:txBody>
@@ -3473,6 +3633,164 @@
                 </a:solidFill>
                 <a:latin typeface="Arial"/>
               </a:rPr>
+              <a:t>Reading</a:t>
+            </a:r>
+          </a:p>
+        </p:txBody>
+      </p:sp>
+      <p:sp>
+        <p:nvSpPr>
+          <p:cNvPr id="4" name="Rectangle 3"/>
+          <p:cNvSpPr/>
+          <p:nvPr/>
+        </p:nvSpPr>
+        <p:spPr>
+          <a:xfrm>
+            <a:off x="457200" y="1371600"/>
+            <a:ext cx="11247120" cy="27940"/>
+          </a:xfrm>
+          <a:prstGeom prst="rect">
+            <a:avLst/>
+          </a:prstGeom>
+          <a:solidFill>
+            <a:srgbClr val="CC0000"/>
+          </a:solidFill>
+          <a:ln>
+            <a:noFill/>
+          </a:ln>
+        </p:spPr>
+        <p:style>
+          <a:lnRef idx="1">
+            <a:schemeClr val="accent1"/>
+          </a:lnRef>
+          <a:fillRef idx="3">
+            <a:schemeClr val="accent1"/>
+          </a:fillRef>
+          <a:effectRef idx="2">
+            <a:schemeClr val="accent1"/>
+          </a:effectRef>
+          <a:fontRef idx="minor">
+            <a:schemeClr val="lt1"/>
+          </a:fontRef>
+        </p:style>
+        <p:txBody>
+          <a:bodyPr rtlCol="0" anchor="ctr"/>
+          <a:lstStyle/>
+          <a:p>
+            <a:pPr algn="ctr"/>
+          </a:p>
+        </p:txBody>
+      </p:sp>
+      <p:sp>
+        <p:nvSpPr>
+          <p:cNvPr id="5" name="TextBox 4"/>
+          <p:cNvSpPr txBox="1"/>
+          <p:nvPr/>
+        </p:nvSpPr>
+        <p:spPr>
+          <a:xfrm>
+            <a:off x="640080" y="1600200"/>
+            <a:ext cx="10972800" cy="4937760"/>
+          </a:xfrm>
+          <a:prstGeom prst="rect">
+            <a:avLst/>
+          </a:prstGeom>
+          <a:noFill/>
+        </p:spPr>
+        <p:txBody>
+          <a:bodyPr wrap="square">
+            <a:spAutoFit/>
+          </a:bodyPr>
+          <a:lstStyle/>
+          <a:p>
+            <a:pPr>
+              <a:spcAft>
+                <a:spcPts val="800"/>
+              </a:spcAft>
+            </a:pPr>
+            <a:r>
+              <a:rPr sz="1700" b="0" i="0">
+                <a:solidFill>
+                  <a:srgbClr val="1A1A1A"/>
+                </a:solidFill>
+                <a:latin typeface="Arial"/>
+              </a:rPr>
+              <a:t>•  Cartea et al., Ch. 10-11; Bailey-Lopez de Prado (2014); Lopez de Prado (2018)</a:t>
+            </a:r>
+          </a:p>
+        </p:txBody>
+      </p:sp>
+    </p:spTree>
+  </p:cSld>
+  <p:clrMapOvr>
+    <a:masterClrMapping/>
+  </p:clrMapOvr>
+</p:sld>
+</file>
+
+<file path=ppt/slides/slide12.xml><?xml version="1.0" encoding="utf-8"?>
+<p:sld xmlns:a="http://schemas.openxmlformats.org/drawingml/2006/main" xmlns:p="http://schemas.openxmlformats.org/presentationml/2006/main" xmlns:r="http://schemas.openxmlformats.org/officeDocument/2006/relationships">
+  <p:cSld>
+    <p:spTree>
+      <p:nvGrpSpPr>
+        <p:cNvPr id="1" name=""/>
+        <p:cNvGrpSpPr/>
+        <p:nvPr/>
+      </p:nvGrpSpPr>
+      <p:grpSpPr/>
+      <p:pic>
+        <p:nvPicPr>
+          <p:cNvPr id="2" name="Picture 1" descr="ncsu_logo.png"/>
+          <p:cNvPicPr>
+            <a:picLocks noChangeAspect="1"/>
+          </p:cNvPicPr>
+          <p:nvPr/>
+        </p:nvPicPr>
+        <p:blipFill>
+          <a:blip r:embed="rId2"/>
+          <a:stretch>
+            <a:fillRect/>
+          </a:stretch>
+        </p:blipFill>
+        <p:spPr>
+          <a:xfrm>
+            <a:off x="9784080" y="274320"/>
+            <a:ext cx="2011680" cy="316653"/>
+          </a:xfrm>
+          <a:prstGeom prst="rect">
+            <a:avLst/>
+          </a:prstGeom>
+        </p:spPr>
+      </p:pic>
+      <p:sp>
+        <p:nvSpPr>
+          <p:cNvPr id="3" name="TextBox 2"/>
+          <p:cNvSpPr txBox="1"/>
+          <p:nvPr/>
+        </p:nvSpPr>
+        <p:spPr>
+          <a:xfrm>
+            <a:off x="457200" y="457200"/>
+            <a:ext cx="8961120" cy="822960"/>
+          </a:xfrm>
+          <a:prstGeom prst="rect">
+            <a:avLst/>
+          </a:prstGeom>
+          <a:noFill/>
+        </p:spPr>
+        <p:txBody>
+          <a:bodyPr wrap="square">
+            <a:spAutoFit/>
+          </a:bodyPr>
+          <a:lstStyle/>
+          <a:p>
+            <a:r>
+              <a:rPr sz="2400" b="1" i="0">
+                <a:solidFill>
+                  <a:srgbClr val="990000"/>
+                </a:solidFill>
+                <a:latin typeface="Arial"/>
+              </a:rPr>
               <a:t>References</a:t>
             </a:r>
           </a:p>
@@ -3679,7 +3997,7 @@
                 </a:solidFill>
                 <a:latin typeface="Arial"/>
               </a:rPr>
-              <a:t>Learning Objectives</a:t>
+              <a:t>Contents</a:t>
             </a:r>
           </a:p>
         </p:txBody>
@@ -3751,49 +4069,161 @@
           <a:p>
             <a:pPr>
               <a:spcAft>
-                <a:spcPts val="800"/>
+                <a:spcPts val="500"/>
               </a:spcAft>
             </a:pPr>
             <a:r>
-              <a:rPr sz="1700" b="0" i="0">
+              <a:rPr sz="1200" b="0" i="0">
                 <a:solidFill>
                   <a:srgbClr val="1A1A1A"/>
                 </a:solidFill>
                 <a:latin typeface="Arial"/>
               </a:rPr>
-              <a:t>•  Build an event-driven options backtest</a:t>
+              <a:t>•  Learning objectives</a:t>
             </a:r>
           </a:p>
           <a:p>
             <a:pPr>
               <a:spcAft>
-                <a:spcPts val="800"/>
+                <a:spcPts val="500"/>
               </a:spcAft>
             </a:pPr>
             <a:r>
-              <a:rPr sz="1700" b="0" i="0">
+              <a:rPr sz="1200" b="0" i="0">
                 <a:solidFill>
                   <a:srgbClr val="1A1A1A"/>
                 </a:solidFill>
                 <a:latin typeface="Arial"/>
               </a:rPr>
-              <a:t>•  Produce a full P&amp;L attribution and risk metrics</a:t>
+              <a:t>•  Lecture 1: Backtest Architecture &amp; Risk</a:t>
             </a:r>
           </a:p>
           <a:p>
             <a:pPr>
               <a:spcAft>
-                <a:spcPts val="800"/>
+                <a:spcPts val="500"/>
               </a:spcAft>
             </a:pPr>
             <a:r>
-              <a:rPr sz="1700" b="0" i="0">
+              <a:rPr sz="1200" b="0" i="0">
                 <a:solidFill>
                   <a:srgbClr val="1A1A1A"/>
                 </a:solidFill>
                 <a:latin typeface="Arial"/>
               </a:rPr>
-              <a:t>•  Understand taker strategies and order-flow toxicity</a:t>
+              <a:t>•  Lecture 2 (Guest: Fenni Kang, Coincall): Taker Strategies</a:t>
+            </a:r>
+          </a:p>
+          <a:p>
+            <a:pPr>
+              <a:spcAft>
+                <a:spcPts val="500"/>
+              </a:spcAft>
+            </a:pPr>
+            <a:r>
+              <a:rPr sz="1200" b="0" i="0">
+                <a:solidFill>
+                  <a:srgbClr val="1A1A1A"/>
+                </a:solidFill>
+                <a:latin typeface="Arial"/>
+              </a:rPr>
+              <a:t>•  Illustration</a:t>
+            </a:r>
+          </a:p>
+          <a:p>
+            <a:pPr>
+              <a:spcAft>
+                <a:spcPts val="500"/>
+              </a:spcAft>
+            </a:pPr>
+            <a:r>
+              <a:rPr sz="1200" b="0" i="0">
+                <a:solidFill>
+                  <a:srgbClr val="1A1A1A"/>
+                </a:solidFill>
+                <a:latin typeface="Arial"/>
+              </a:rPr>
+              <a:t>•  Derivation &amp; rationale</a:t>
+            </a:r>
+          </a:p>
+          <a:p>
+            <a:pPr>
+              <a:spcAft>
+                <a:spcPts val="500"/>
+              </a:spcAft>
+            </a:pPr>
+            <a:r>
+              <a:rPr sz="1200" b="0" i="0">
+                <a:solidFill>
+                  <a:srgbClr val="1A1A1A"/>
+                </a:solidFill>
+                <a:latin typeface="Arial"/>
+              </a:rPr>
+              <a:t>•  Getting the data from Coincall</a:t>
+            </a:r>
+          </a:p>
+          <a:p>
+            <a:pPr>
+              <a:spcAft>
+                <a:spcPts val="500"/>
+              </a:spcAft>
+            </a:pPr>
+            <a:r>
+              <a:rPr sz="1200" b="0" i="0">
+                <a:solidFill>
+                  <a:srgbClr val="1A1A1A"/>
+                </a:solidFill>
+                <a:latin typeface="Arial"/>
+              </a:rPr>
+              <a:t>•  Code: week9_attribution.py</a:t>
+            </a:r>
+          </a:p>
+          <a:p>
+            <a:pPr>
+              <a:spcAft>
+                <a:spcPts val="500"/>
+              </a:spcAft>
+            </a:pPr>
+            <a:r>
+              <a:rPr sz="1200" b="0" i="0">
+                <a:solidFill>
+                  <a:srgbClr val="1A1A1A"/>
+                </a:solidFill>
+                <a:latin typeface="Arial"/>
+              </a:rPr>
+              <a:t>•  Glossary of key terms</a:t>
+            </a:r>
+          </a:p>
+          <a:p>
+            <a:pPr>
+              <a:spcAft>
+                <a:spcPts val="500"/>
+              </a:spcAft>
+            </a:pPr>
+            <a:r>
+              <a:rPr sz="1200" b="0" i="0">
+                <a:solidFill>
+                  <a:srgbClr val="1A1A1A"/>
+                </a:solidFill>
+                <a:latin typeface="Arial"/>
+              </a:rPr>
+              <a:t>•  Reading</a:t>
+            </a:r>
+          </a:p>
+          <a:p>
+            <a:pPr>
+              <a:spcAft>
+                <a:spcPts val="500"/>
+              </a:spcAft>
+            </a:pPr>
+            <a:r>
+              <a:rPr sz="1200" b="0" i="0">
+                <a:solidFill>
+                  <a:srgbClr val="1A1A1A"/>
+                </a:solidFill>
+                <a:latin typeface="Arial"/>
+              </a:rPr>
+              <a:t>•  References</a:t>
             </a:r>
           </a:p>
         </p:txBody>
@@ -3869,7 +4299,7 @@
                 </a:solidFill>
                 <a:latin typeface="Arial"/>
               </a:rPr>
-              <a:t>Lecture 1: Backtest Architecture &amp; Risk</a:t>
+              <a:t>Learning Objectives</a:t>
             </a:r>
           </a:p>
         </p:txBody>
@@ -3951,7 +4381,7 @@
                 </a:solidFill>
                 <a:latin typeface="Arial"/>
               </a:rPr>
-              <a:t>•  Event-driven simulation with deterministic replay</a:t>
+              <a:t>•  Build an event-driven options backtest</a:t>
             </a:r>
           </a:p>
           <a:p>
@@ -3967,7 +4397,7 @@
                 </a:solidFill>
                 <a:latin typeface="Arial"/>
               </a:rPr>
-              <a:t>•  Fill simulator; state of inventory and Greeks</a:t>
+              <a:t>•  Produce a full P&amp;L attribution and risk metrics</a:t>
             </a:r>
           </a:p>
           <a:p>
@@ -3983,23 +4413,7 @@
                 </a:solidFill>
                 <a:latin typeface="Arial"/>
               </a:rPr>
-              <a:t>•  Pitfalls: look-ahead, unrealistic fills, expiry handling</a:t>
-            </a:r>
-          </a:p>
-          <a:p>
-            <a:pPr>
-              <a:spcAft>
-                <a:spcPts val="800"/>
-              </a:spcAft>
-            </a:pPr>
-            <a:r>
-              <a:rPr sz="1700" b="0" i="0">
-                <a:solidFill>
-                  <a:srgbClr val="1A1A1A"/>
-                </a:solidFill>
-                <a:latin typeface="Arial"/>
-              </a:rPr>
-              <a:t>•  Sharpe with block-bootstrap confidence intervals</a:t>
+              <a:t>•  Understand taker strategies and order-flow toxicity</a:t>
             </a:r>
           </a:p>
         </p:txBody>
@@ -4075,7 +4489,7 @@
                 </a:solidFill>
                 <a:latin typeface="Arial"/>
               </a:rPr>
-              <a:t>Lecture 2 (Guest: Fenni Kang, Coincall): Taker Strategies</a:t>
+              <a:t>Lecture 1: Backtest Architecture &amp; Risk</a:t>
             </a:r>
           </a:p>
         </p:txBody>
@@ -4157,7 +4571,7 @@
                 </a:solidFill>
                 <a:latin typeface="Arial"/>
               </a:rPr>
-              <a:t>•  When and why takers cross the spread</a:t>
+              <a:t>•  Event-driven simulation with deterministic replay</a:t>
             </a:r>
           </a:p>
           <a:p>
@@ -4173,7 +4587,7 @@
                 </a:solidFill>
                 <a:latin typeface="Arial"/>
               </a:rPr>
-              <a:t>•  Signals behind aggressive flow: momentum, liquidations, news</a:t>
+              <a:t>•  Fill simulator; state of inventory and Greeks</a:t>
             </a:r>
           </a:p>
           <a:p>
@@ -4189,7 +4603,23 @@
                 </a:solidFill>
                 <a:latin typeface="Arial"/>
               </a:rPr>
-              <a:t>•  What taker behaviour means for the maker's toxicity</a:t>
+              <a:t>•  Pitfalls: look-ahead, unrealistic fills, expiry handling</a:t>
+            </a:r>
+          </a:p>
+          <a:p>
+            <a:pPr>
+              <a:spcAft>
+                <a:spcPts val="800"/>
+              </a:spcAft>
+            </a:pPr>
+            <a:r>
+              <a:rPr sz="1700" b="0" i="0">
+                <a:solidFill>
+                  <a:srgbClr val="1A1A1A"/>
+                </a:solidFill>
+                <a:latin typeface="Arial"/>
+              </a:rPr>
+              <a:t>•  Sharpe with block-bootstrap confidence intervals</a:t>
             </a:r>
           </a:p>
         </p:txBody>
@@ -4228,7 +4658,7 @@
         </p:blipFill>
         <p:spPr>
           <a:xfrm>
-            <a:off x="9784080" y="228600"/>
+            <a:off x="9784080" y="274320"/>
             <a:ext cx="2011680" cy="316653"/>
           </a:xfrm>
           <a:prstGeom prst="rect">
@@ -4244,8 +4674,8 @@
         </p:nvSpPr>
         <p:spPr>
           <a:xfrm>
-            <a:off x="457200" y="411480"/>
-            <a:ext cx="8961120" cy="731520"/>
+            <a:off x="457200" y="457200"/>
+            <a:ext cx="8961120" cy="822960"/>
           </a:xfrm>
           <a:prstGeom prst="rect">
             <a:avLst/>
@@ -4253,47 +4683,137 @@
           <a:noFill/>
         </p:spPr>
         <p:txBody>
-          <a:bodyPr wrap="none">
+          <a:bodyPr wrap="square">
             <a:spAutoFit/>
           </a:bodyPr>
           <a:lstStyle/>
           <a:p>
             <a:r>
-              <a:rPr sz="2200" b="1" i="0">
+              <a:rPr sz="2400" b="1" i="0">
                 <a:solidFill>
                   <a:srgbClr val="990000"/>
                 </a:solidFill>
                 <a:latin typeface="Arial"/>
               </a:rPr>
-              <a:t>Illustration</a:t>
-            </a:r>
-          </a:p>
-        </p:txBody>
-      </p:sp>
-      <p:pic>
-        <p:nvPicPr>
-          <p:cNvPr id="4" name="Picture 3" descr="week09.png"/>
-          <p:cNvPicPr>
-            <a:picLocks noChangeAspect="1"/>
-          </p:cNvPicPr>
+              <a:t>Lecture 2 (Guest: Fenni Kang, Coincall): Taker Strategies</a:t>
+            </a:r>
+          </a:p>
+        </p:txBody>
+      </p:sp>
+      <p:sp>
+        <p:nvSpPr>
+          <p:cNvPr id="4" name="Rectangle 3"/>
+          <p:cNvSpPr/>
           <p:nvPr/>
-        </p:nvPicPr>
-        <p:blipFill>
-          <a:blip r:embed="rId3"/>
-          <a:stretch>
-            <a:fillRect/>
-          </a:stretch>
-        </p:blipFill>
-        <p:spPr>
-          <a:xfrm>
-            <a:off x="1280160" y="1371600"/>
-            <a:ext cx="9601200" cy="5660571"/>
+        </p:nvSpPr>
+        <p:spPr>
+          <a:xfrm>
+            <a:off x="457200" y="1371600"/>
+            <a:ext cx="11247120" cy="27940"/>
           </a:xfrm>
           <a:prstGeom prst="rect">
             <a:avLst/>
           </a:prstGeom>
-        </p:spPr>
-      </p:pic>
+          <a:solidFill>
+            <a:srgbClr val="CC0000"/>
+          </a:solidFill>
+          <a:ln>
+            <a:noFill/>
+          </a:ln>
+        </p:spPr>
+        <p:style>
+          <a:lnRef idx="1">
+            <a:schemeClr val="accent1"/>
+          </a:lnRef>
+          <a:fillRef idx="3">
+            <a:schemeClr val="accent1"/>
+          </a:fillRef>
+          <a:effectRef idx="2">
+            <a:schemeClr val="accent1"/>
+          </a:effectRef>
+          <a:fontRef idx="minor">
+            <a:schemeClr val="lt1"/>
+          </a:fontRef>
+        </p:style>
+        <p:txBody>
+          <a:bodyPr rtlCol="0" anchor="ctr"/>
+          <a:lstStyle/>
+          <a:p>
+            <a:pPr algn="ctr"/>
+          </a:p>
+        </p:txBody>
+      </p:sp>
+      <p:sp>
+        <p:nvSpPr>
+          <p:cNvPr id="5" name="TextBox 4"/>
+          <p:cNvSpPr txBox="1"/>
+          <p:nvPr/>
+        </p:nvSpPr>
+        <p:spPr>
+          <a:xfrm>
+            <a:off x="640080" y="1600200"/>
+            <a:ext cx="10972800" cy="4937760"/>
+          </a:xfrm>
+          <a:prstGeom prst="rect">
+            <a:avLst/>
+          </a:prstGeom>
+          <a:noFill/>
+        </p:spPr>
+        <p:txBody>
+          <a:bodyPr wrap="square">
+            <a:spAutoFit/>
+          </a:bodyPr>
+          <a:lstStyle/>
+          <a:p>
+            <a:pPr>
+              <a:spcAft>
+                <a:spcPts val="800"/>
+              </a:spcAft>
+            </a:pPr>
+            <a:r>
+              <a:rPr sz="1700" b="0" i="0">
+                <a:solidFill>
+                  <a:srgbClr val="1A1A1A"/>
+                </a:solidFill>
+                <a:latin typeface="Arial"/>
+              </a:rPr>
+              <a:t>•  When and why takers cross the spread</a:t>
+            </a:r>
+          </a:p>
+          <a:p>
+            <a:pPr>
+              <a:spcAft>
+                <a:spcPts val="800"/>
+              </a:spcAft>
+            </a:pPr>
+            <a:r>
+              <a:rPr sz="1700" b="0" i="0">
+                <a:solidFill>
+                  <a:srgbClr val="1A1A1A"/>
+                </a:solidFill>
+                <a:latin typeface="Arial"/>
+              </a:rPr>
+              <a:t>•  Signals behind aggressive flow: momentum, liquidations, news</a:t>
+            </a:r>
+          </a:p>
+          <a:p>
+            <a:pPr>
+              <a:spcAft>
+                <a:spcPts val="800"/>
+              </a:spcAft>
+            </a:pPr>
+            <a:r>
+              <a:rPr sz="1700" b="0" i="0">
+                <a:solidFill>
+                  <a:srgbClr val="1A1A1A"/>
+                </a:solidFill>
+                <a:latin typeface="Arial"/>
+              </a:rPr>
+              <a:t>•  What taker behaviour means for the maker's toxicity</a:t>
+            </a:r>
+          </a:p>
+        </p:txBody>
+      </p:sp>
     </p:spTree>
   </p:cSld>
   <p:clrMapOvr>
@@ -4328,7 +4848,7 @@
         </p:blipFill>
         <p:spPr>
           <a:xfrm>
-            <a:off x="9784080" y="274320"/>
+            <a:off x="9784080" y="228600"/>
             <a:ext cx="2011680" cy="316653"/>
           </a:xfrm>
           <a:prstGeom prst="rect">
@@ -4344,8 +4864,8 @@
         </p:nvSpPr>
         <p:spPr>
           <a:xfrm>
-            <a:off x="457200" y="457200"/>
-            <a:ext cx="8961120" cy="822960"/>
+            <a:off x="457200" y="411480"/>
+            <a:ext cx="8961120" cy="731520"/>
           </a:xfrm>
           <a:prstGeom prst="rect">
             <a:avLst/>
@@ -4353,132 +4873,47 @@
           <a:noFill/>
         </p:spPr>
         <p:txBody>
-          <a:bodyPr wrap="square">
+          <a:bodyPr wrap="none">
             <a:spAutoFit/>
           </a:bodyPr>
           <a:lstStyle/>
           <a:p>
             <a:r>
-              <a:rPr sz="2400" b="1" i="0">
+              <a:rPr sz="2200" b="1" i="0">
                 <a:solidFill>
                   <a:srgbClr val="990000"/>
                 </a:solidFill>
                 <a:latin typeface="Arial"/>
               </a:rPr>
-              <a:t>Key Equations &amp; Why We Choose Them</a:t>
-            </a:r>
-          </a:p>
-          <a:p>
-            <a:r>
-              <a:rPr sz="1300" b="0" i="1">
-                <a:solidFill>
-                  <a:srgbClr val="6D6D6D"/>
-                </a:solidFill>
-                <a:latin typeface="Arial"/>
-              </a:rPr>
-              <a:t>Full derivations in the PDF deck</a:t>
-            </a:r>
-          </a:p>
-        </p:txBody>
-      </p:sp>
-      <p:sp>
-        <p:nvSpPr>
-          <p:cNvPr id="4" name="Rectangle 3"/>
-          <p:cNvSpPr/>
+              <a:t>Illustration</a:t>
+            </a:r>
+          </a:p>
+        </p:txBody>
+      </p:sp>
+      <p:pic>
+        <p:nvPicPr>
+          <p:cNvPr id="4" name="Picture 3" descr="week09.png"/>
+          <p:cNvPicPr>
+            <a:picLocks noChangeAspect="1"/>
+          </p:cNvPicPr>
           <p:nvPr/>
-        </p:nvSpPr>
-        <p:spPr>
-          <a:xfrm>
-            <a:off x="457200" y="1371600"/>
-            <a:ext cx="11247120" cy="27940"/>
+        </p:nvPicPr>
+        <p:blipFill>
+          <a:blip r:embed="rId3"/>
+          <a:stretch>
+            <a:fillRect/>
+          </a:stretch>
+        </p:blipFill>
+        <p:spPr>
+          <a:xfrm>
+            <a:off x="1280160" y="1371600"/>
+            <a:ext cx="9601200" cy="5660571"/>
           </a:xfrm>
           <a:prstGeom prst="rect">
             <a:avLst/>
           </a:prstGeom>
-          <a:solidFill>
-            <a:srgbClr val="CC0000"/>
-          </a:solidFill>
-          <a:ln>
-            <a:noFill/>
-          </a:ln>
-        </p:spPr>
-        <p:style>
-          <a:lnRef idx="1">
-            <a:schemeClr val="accent1"/>
-          </a:lnRef>
-          <a:fillRef idx="3">
-            <a:schemeClr val="accent1"/>
-          </a:fillRef>
-          <a:effectRef idx="2">
-            <a:schemeClr val="accent1"/>
-          </a:effectRef>
-          <a:fontRef idx="minor">
-            <a:schemeClr val="lt1"/>
-          </a:fontRef>
-        </p:style>
-        <p:txBody>
-          <a:bodyPr rtlCol="0" anchor="ctr"/>
-          <a:lstStyle/>
-          <a:p>
-            <a:pPr algn="ctr"/>
-          </a:p>
-        </p:txBody>
-      </p:sp>
-      <p:sp>
-        <p:nvSpPr>
-          <p:cNvPr id="5" name="TextBox 4"/>
-          <p:cNvSpPr txBox="1"/>
-          <p:nvPr/>
-        </p:nvSpPr>
-        <p:spPr>
-          <a:xfrm>
-            <a:off x="640080" y="1600200"/>
-            <a:ext cx="10972800" cy="4937760"/>
-          </a:xfrm>
-          <a:prstGeom prst="rect">
-            <a:avLst/>
-          </a:prstGeom>
-          <a:noFill/>
-        </p:spPr>
-        <p:txBody>
-          <a:bodyPr wrap="square">
-            <a:spAutoFit/>
-          </a:bodyPr>
-          <a:lstStyle/>
-          <a:p>
-            <a:pPr>
-              <a:spcAft>
-                <a:spcPts val="500"/>
-              </a:spcAft>
-            </a:pPr>
-            <a:r>
-              <a:rPr sz="1200" b="0" i="0">
-                <a:solidFill>
-                  <a:srgbClr val="1A1A1A"/>
-                </a:solidFill>
-                <a:latin typeface="Consolas"/>
-              </a:rPr>
-              <a:t>    \widehat{SR}=\frac{\bar r}{s_r}\sqrt{252},\quad \text{CI via block bootstrap on } \{r_t\}</a:t>
-            </a:r>
-          </a:p>
-          <a:p>
-            <a:pPr>
-              <a:spcAft>
-                <a:spcPts val="500"/>
-              </a:spcAft>
-            </a:pPr>
-            <a:r>
-              <a:rPr sz="1200" b="0" i="0">
-                <a:solidFill>
-                  <a:srgbClr val="1A1A1A"/>
-                </a:solidFill>
-                <a:latin typeface="Arial"/>
-              </a:rPr>
-              <a:t>•  why: Daily Sharpe is annualized by $\sqrt{252}$, but a point estimate over a few months is noisy and serially correlated. We resample BLOCKS of returns (preserving autocorrelation) to get an honest confidence interval -- a high Sharpe with a wide CI is not a real edge.</a:t>
-            </a:r>
-          </a:p>
-        </p:txBody>
-      </p:sp>
+        </p:spPr>
+      </p:pic>
     </p:spTree>
   </p:cSld>
   <p:clrMapOvr>
@@ -4550,7 +4985,7 @@
                 </a:solidFill>
                 <a:latin typeface="Arial"/>
               </a:rPr>
-              <a:t>Getting the Data from Coincall</a:t>
+              <a:t>Key Equations &amp; Why We Choose Them</a:t>
             </a:r>
           </a:p>
           <a:p>
@@ -4561,7 +4996,7 @@
                 </a:solidFill>
                 <a:latin typeface="Arial"/>
               </a:rPr>
-              <a:t>Cross-check exact paths at https://docs.coincall.com/</a:t>
+              <a:t>Full derivations in the PDF deck</a:t>
             </a:r>
           </a:p>
         </p:txBody>
@@ -4641,9 +5076,9 @@
                 <a:solidFill>
                   <a:srgbClr val="1A1A1A"/>
                 </a:solidFill>
-                <a:latin typeface="Arial"/>
-              </a:rPr>
-              <a:t>•  Full options L2 + trades + perp + funding for 3 months:</a:t>
+                <a:latin typeface="Consolas"/>
+              </a:rPr>
+              <a:t>    \widehat{SR}=\frac{\bar r}{s_r}\sqrt{252},\quad \text{CI via block bootstrap on } \{r_t\}</a:t>
             </a:r>
           </a:p>
           <a:p>
@@ -4657,73 +5092,9 @@
                 <a:solidFill>
                   <a:srgbClr val="1A1A1A"/>
                 </a:solidFill>
-                <a:latin typeface="Consolas"/>
-              </a:rPr>
-              <a:t>    coincall_btc_options_l2_2025Q4.parquet / ..._trades_...</a:t>
-            </a:r>
-          </a:p>
-          <a:p>
-            <a:pPr>
-              <a:spcAft>
-                <a:spcPts val="500"/>
-              </a:spcAft>
-            </a:pPr>
-            <a:r>
-              <a:rPr sz="1200" b="0" i="0">
-                <a:solidFill>
-                  <a:srgbClr val="1A1A1A"/>
-                </a:solidFill>
-                <a:latin typeface="Consolas"/>
-              </a:rPr>
-              <a:t>    coincall_eth_options_l2_2025Q4.parquet / ..._trades_...</a:t>
-            </a:r>
-          </a:p>
-          <a:p>
-            <a:pPr>
-              <a:spcAft>
-                <a:spcPts val="500"/>
-              </a:spcAft>
-            </a:pPr>
-            <a:r>
-              <a:rPr sz="1200" b="0" i="0">
-                <a:solidFill>
-                  <a:srgbClr val="1A1A1A"/>
-                </a:solidFill>
-                <a:latin typeface="Consolas"/>
-              </a:rPr>
-              <a:t>    coincall_btc_eth_perp_l2_2025Q4.parquet ; coincall_funding_rates_...</a:t>
-            </a:r>
-          </a:p>
-          <a:p>
-            <a:pPr>
-              <a:spcAft>
-                <a:spcPts val="500"/>
-              </a:spcAft>
-            </a:pPr>
-            <a:r>
-              <a:rPr sz="1200" b="0" i="0">
-                <a:solidFill>
-                  <a:srgbClr val="1A1A1A"/>
-                </a:solidFill>
                 <a:latin typeface="Arial"/>
               </a:rPr>
-              <a:t>•  Klines for regime context: GET /open/option/market/kline/history/v1/{name}?period=h1</a:t>
-            </a:r>
-          </a:p>
-          <a:p>
-            <a:pPr>
-              <a:spcAft>
-                <a:spcPts val="500"/>
-              </a:spcAft>
-            </a:pPr>
-            <a:r>
-              <a:rPr sz="1200" b="0" i="0">
-                <a:solidFill>
-                  <a:srgbClr val="1A1A1A"/>
-                </a:solidFill>
-                <a:latin typeface="Arial"/>
-              </a:rPr>
-              <a:t>•  Trade tape carries mark IV at trade -&gt; calibrate the fill simulator</a:t>
+              <a:t>•  why: Daily Sharpe is annualized by $\sqrt{252}$, but a point estimate over a few months is noisy and serially correlated. We resample BLOCKS of returns (preserving autocorrelation) to get an honest confidence interval -- a high Sharpe with a wide CI is not a real edge.</a:t>
             </a:r>
           </a:p>
         </p:txBody>
@@ -4737,324 +5108,6 @@
 </file>
 
 <file path=ppt/slides/slide8.xml><?xml version="1.0" encoding="utf-8"?>
-<p:sld xmlns:a="http://schemas.openxmlformats.org/drawingml/2006/main" xmlns:p="http://schemas.openxmlformats.org/presentationml/2006/main" xmlns:r="http://schemas.openxmlformats.org/officeDocument/2006/relationships">
-  <p:cSld>
-    <p:spTree>
-      <p:nvGrpSpPr>
-        <p:cNvPr id="1" name=""/>
-        <p:cNvGrpSpPr/>
-        <p:nvPr/>
-      </p:nvGrpSpPr>
-      <p:grpSpPr/>
-      <p:sp>
-        <p:nvSpPr>
-          <p:cNvPr id="2" name="TextBox 1"/>
-          <p:cNvSpPr txBox="1"/>
-          <p:nvPr/>
-        </p:nvSpPr>
-        <p:spPr>
-          <a:xfrm>
-            <a:off x="457200" y="365760"/>
-            <a:ext cx="11247120" cy="640080"/>
-          </a:xfrm>
-          <a:prstGeom prst="rect">
-            <a:avLst/>
-          </a:prstGeom>
-          <a:noFill/>
-        </p:spPr>
-        <p:txBody>
-          <a:bodyPr wrap="none">
-            <a:spAutoFit/>
-          </a:bodyPr>
-          <a:lstStyle/>
-          <a:p>
-            <a:r>
-              <a:rPr sz="1800" b="1" i="0">
-                <a:solidFill>
-                  <a:srgbClr val="990000"/>
-                </a:solidFill>
-                <a:latin typeface="Arial"/>
-              </a:rPr>
-              <a:t>Code — week9_attribution.py -- P&amp;L attribution + bootstrap Sharpe</a:t>
-            </a:r>
-          </a:p>
-        </p:txBody>
-      </p:sp>
-      <p:sp>
-        <p:nvSpPr>
-          <p:cNvPr id="3" name="Rectangle 2"/>
-          <p:cNvSpPr/>
-          <p:nvPr/>
-        </p:nvSpPr>
-        <p:spPr>
-          <a:xfrm>
-            <a:off x="457200" y="1097280"/>
-            <a:ext cx="11247120" cy="5394960"/>
-          </a:xfrm>
-          <a:prstGeom prst="rect">
-            <a:avLst/>
-          </a:prstGeom>
-          <a:solidFill>
-            <a:srgbClr val="F5F5F5"/>
-          </a:solidFill>
-          <a:ln w="9525">
-            <a:solidFill>
-              <a:srgbClr val="6D6D6D"/>
-            </a:solidFill>
-          </a:ln>
-        </p:spPr>
-        <p:style>
-          <a:lnRef idx="1">
-            <a:schemeClr val="accent1"/>
-          </a:lnRef>
-          <a:fillRef idx="3">
-            <a:schemeClr val="accent1"/>
-          </a:fillRef>
-          <a:effectRef idx="2">
-            <a:schemeClr val="accent1"/>
-          </a:effectRef>
-          <a:fontRef idx="minor">
-            <a:schemeClr val="lt1"/>
-          </a:fontRef>
-        </p:style>
-        <p:txBody>
-          <a:bodyPr rtlCol="0" anchor="ctr" wrap="square" lIns="182880" tIns="91440"/>
-          <a:lstStyle/>
-          <a:p>
-            <a:pPr algn="ctr">
-              <a:spcAft>
-                <a:spcPts val="0"/>
-              </a:spcAft>
-            </a:pPr>
-            <a:r>
-              <a:rPr sz="1100" b="0" i="0">
-                <a:solidFill>
-                  <a:srgbClr val="1A1A1A"/>
-                </a:solidFill>
-                <a:latin typeface="Consolas"/>
-              </a:rPr>
-              <a:t>import numpy as np</a:t>
-            </a:r>
-          </a:p>
-          <a:p>
-            <a:pPr>
-              <a:spcAft>
-                <a:spcPts val="0"/>
-              </a:spcAft>
-            </a:pPr>
-            <a:r>
-              <a:rPr sz="1100" b="0" i="0">
-                <a:solidFill>
-                  <a:srgbClr val="1A1A1A"/>
-                </a:solidFill>
-                <a:latin typeface="Consolas"/>
-              </a:rPr>
-              <a:t>def attribute(spread, inventory, gamma, hedging):</a:t>
-            </a:r>
-          </a:p>
-          <a:p>
-            <a:pPr>
-              <a:spcAft>
-                <a:spcPts val="0"/>
-              </a:spcAft>
-            </a:pPr>
-            <a:r>
-              <a:rPr sz="1100" b="0" i="0">
-                <a:solidFill>
-                  <a:srgbClr val="1A1A1A"/>
-                </a:solidFill>
-                <a:latin typeface="Consolas"/>
-              </a:rPr>
-              <a:t>    total = spread + inventory + gamma + hedging</a:t>
-            </a:r>
-          </a:p>
-          <a:p>
-            <a:pPr>
-              <a:spcAft>
-                <a:spcPts val="0"/>
-              </a:spcAft>
-            </a:pPr>
-            <a:r>
-              <a:rPr sz="1100" b="0" i="0">
-                <a:solidFill>
-                  <a:srgbClr val="1A1A1A"/>
-                </a:solidFill>
-                <a:latin typeface="Consolas"/>
-              </a:rPr>
-              <a:t>    assert abs(total.sum() - (spread.sum()+inventory.sum()</a:t>
-            </a:r>
-          </a:p>
-          <a:p>
-            <a:pPr>
-              <a:spcAft>
-                <a:spcPts val="0"/>
-              </a:spcAft>
-            </a:pPr>
-            <a:r>
-              <a:rPr sz="1100" b="0" i="0">
-                <a:solidFill>
-                  <a:srgbClr val="1A1A1A"/>
-                </a:solidFill>
-                <a:latin typeface="Consolas"/>
-              </a:rPr>
-              <a:t>               +gamma.sum()+hedging.sum())) &lt; 1e-6           # must sum to total</a:t>
-            </a:r>
-          </a:p>
-          <a:p>
-            <a:pPr>
-              <a:spcAft>
-                <a:spcPts val="0"/>
-              </a:spcAft>
-            </a:pPr>
-            <a:r>
-              <a:rPr sz="1100" b="0" i="0">
-                <a:solidFill>
-                  <a:srgbClr val="1A1A1A"/>
-                </a:solidFill>
-                <a:latin typeface="Consolas"/>
-              </a:rPr>
-              <a:t>    return dict(spread=spread, inventory=inventory, gamma=gamma,</a:t>
-            </a:r>
-          </a:p>
-          <a:p>
-            <a:pPr>
-              <a:spcAft>
-                <a:spcPts val="0"/>
-              </a:spcAft>
-            </a:pPr>
-            <a:r>
-              <a:rPr sz="1100" b="0" i="0">
-                <a:solidFill>
-                  <a:srgbClr val="1A1A1A"/>
-                </a:solidFill>
-                <a:latin typeface="Consolas"/>
-              </a:rPr>
-              <a:t>                hedging=hedging, total=total)</a:t>
-            </a:r>
-          </a:p>
-          <a:p>
-            <a:pPr>
-              <a:spcAft>
-                <a:spcPts val="0"/>
-              </a:spcAft>
-            </a:pPr>
-            <a:r>
-              <a:rPr sz="1100" b="0" i="0">
-                <a:solidFill>
-                  <a:srgbClr val="1A1A1A"/>
-                </a:solidFill>
-                <a:latin typeface="Consolas"/>
-              </a:rPr>
-              <a:t> </a:t>
-            </a:r>
-          </a:p>
-          <a:p>
-            <a:pPr>
-              <a:spcAft>
-                <a:spcPts val="0"/>
-              </a:spcAft>
-            </a:pPr>
-            <a:r>
-              <a:rPr sz="1100" b="0" i="0">
-                <a:solidFill>
-                  <a:srgbClr val="1A1A1A"/>
-                </a:solidFill>
-                <a:latin typeface="Consolas"/>
-              </a:rPr>
-              <a:t>def bootstrap_sharpe(r, block=5, n=2000, seed=0):</a:t>
-            </a:r>
-          </a:p>
-          <a:p>
-            <a:pPr>
-              <a:spcAft>
-                <a:spcPts val="0"/>
-              </a:spcAft>
-            </a:pPr>
-            <a:r>
-              <a:rPr sz="1100" b="0" i="0">
-                <a:solidFill>
-                  <a:srgbClr val="1A1A1A"/>
-                </a:solidFill>
-                <a:latin typeface="Consolas"/>
-              </a:rPr>
-              <a:t>    rng = np.random.default_rng(seed); T = len(r); out = []</a:t>
-            </a:r>
-          </a:p>
-          <a:p>
-            <a:pPr>
-              <a:spcAft>
-                <a:spcPts val="0"/>
-              </a:spcAft>
-            </a:pPr>
-            <a:r>
-              <a:rPr sz="1100" b="0" i="0">
-                <a:solidFill>
-                  <a:srgbClr val="1A1A1A"/>
-                </a:solidFill>
-                <a:latin typeface="Consolas"/>
-              </a:rPr>
-              <a:t>    for _ in range(n):</a:t>
-            </a:r>
-          </a:p>
-          <a:p>
-            <a:pPr>
-              <a:spcAft>
-                <a:spcPts val="0"/>
-              </a:spcAft>
-            </a:pPr>
-            <a:r>
-              <a:rPr sz="1100" b="0" i="0">
-                <a:solidFill>
-                  <a:srgbClr val="1A1A1A"/>
-                </a:solidFill>
-                <a:latin typeface="Consolas"/>
-              </a:rPr>
-              <a:t>        idx = (rng.integers(0, T-block, T//block)[:,None] + np.arange(block)).ravel()</a:t>
-            </a:r>
-          </a:p>
-          <a:p>
-            <a:pPr>
-              <a:spcAft>
-                <a:spcPts val="0"/>
-              </a:spcAft>
-            </a:pPr>
-            <a:r>
-              <a:rPr sz="1100" b="0" i="0">
-                <a:solidFill>
-                  <a:srgbClr val="1A1A1A"/>
-                </a:solidFill>
-                <a:latin typeface="Consolas"/>
-              </a:rPr>
-              <a:t>        s = r[idx]; out.append(s.mean()/s.std()*np.sqrt(252))</a:t>
-            </a:r>
-          </a:p>
-          <a:p>
-            <a:pPr>
-              <a:spcAft>
-                <a:spcPts val="0"/>
-              </a:spcAft>
-            </a:pPr>
-            <a:r>
-              <a:rPr sz="1100" b="0" i="0">
-                <a:solidFill>
-                  <a:srgbClr val="1A1A1A"/>
-                </a:solidFill>
-                <a:latin typeface="Consolas"/>
-              </a:rPr>
-              <a:t>    return np.percentile(out, [2.5, 50, 97.5])               # CI for the Sharpe</a:t>
-            </a:r>
-          </a:p>
-        </p:txBody>
-      </p:sp>
-    </p:spTree>
-  </p:cSld>
-  <p:clrMapOvr>
-    <a:masterClrMapping/>
-  </p:clrMapOvr>
-</p:sld>
-</file>
-
-<file path=ppt/slides/slide9.xml><?xml version="1.0" encoding="utf-8"?>
 <p:sld xmlns:a="http://schemas.openxmlformats.org/drawingml/2006/main" xmlns:p="http://schemas.openxmlformats.org/presentationml/2006/main" xmlns:r="http://schemas.openxmlformats.org/officeDocument/2006/relationships">
   <p:cSld>
     <p:spTree>
@@ -5105,7 +5158,7 @@
           <a:noFill/>
         </p:spPr>
         <p:txBody>
-          <a:bodyPr wrap="none">
+          <a:bodyPr wrap="square">
             <a:spAutoFit/>
           </a:bodyPr>
           <a:lstStyle/>
@@ -5117,7 +5170,18 @@
                 </a:solidFill>
                 <a:latin typeface="Arial"/>
               </a:rPr>
-              <a:t>Glossary — Key Terms</a:t>
+              <a:t>Getting the Data from Coincall</a:t>
+            </a:r>
+          </a:p>
+          <a:p>
+            <a:r>
+              <a:rPr sz="1300" b="0" i="1">
+                <a:solidFill>
+                  <a:srgbClr val="6D6D6D"/>
+                </a:solidFill>
+                <a:latin typeface="Arial"/>
+              </a:rPr>
+              <a:t>Cross-check exact paths at https://docs.coincall.com/</a:t>
             </a:r>
           </a:p>
         </p:txBody>
@@ -5189,176 +5253,415 @@
           <a:p>
             <a:pPr>
               <a:spcAft>
-                <a:spcPts val="700"/>
+                <a:spcPts val="500"/>
               </a:spcAft>
             </a:pPr>
             <a:r>
-              <a:rPr sz="1500" b="1" i="0">
-                <a:solidFill>
-                  <a:srgbClr val="CC0000"/>
+              <a:rPr sz="1200" b="0" i="0">
+                <a:solidFill>
+                  <a:srgbClr val="1A1A1A"/>
                 </a:solidFill>
                 <a:latin typeface="Arial"/>
               </a:rPr>
-              <a:t>Event-driven backtest — </a:t>
-            </a:r>
-            <a:r>
-              <a:rPr sz="1500" b="0" i="0">
-                <a:solidFill>
-                  <a:srgbClr val="1A1A1A"/>
-                </a:solidFill>
-                <a:latin typeface="Arial"/>
-              </a:rPr>
-              <a:t>a simulation that replays timestamped events in order</a:t>
+              <a:t>•  Full options L2 + trades + perp + funding for 3 months:</a:t>
             </a:r>
           </a:p>
           <a:p>
             <a:pPr>
               <a:spcAft>
-                <a:spcPts val="700"/>
+                <a:spcPts val="500"/>
               </a:spcAft>
             </a:pPr>
             <a:r>
-              <a:rPr sz="1500" b="1" i="0">
-                <a:solidFill>
-                  <a:srgbClr val="CC0000"/>
-                </a:solidFill>
-                <a:latin typeface="Arial"/>
-              </a:rPr>
-              <a:t>Deterministic replay — </a:t>
-            </a:r>
-            <a:r>
-              <a:rPr sz="1500" b="0" i="0">
+              <a:rPr sz="1200" b="0" i="0">
                 <a:solidFill>
                   <a:srgbClr val="1A1A1A"/>
                 </a:solidFill>
-                <a:latin typeface="Arial"/>
-              </a:rPr>
-              <a:t>bitwise-identical results on re-run</a:t>
+                <a:latin typeface="Consolas"/>
+              </a:rPr>
+              <a:t>    coincall_btc_options_l2_2025Q4.parquet / ..._trades_...</a:t>
             </a:r>
           </a:p>
           <a:p>
             <a:pPr>
               <a:spcAft>
-                <a:spcPts val="700"/>
+                <a:spcPts val="500"/>
               </a:spcAft>
             </a:pPr>
             <a:r>
-              <a:rPr sz="1500" b="1" i="0">
-                <a:solidFill>
-                  <a:srgbClr val="CC0000"/>
-                </a:solidFill>
-                <a:latin typeface="Arial"/>
-              </a:rPr>
-              <a:t>Look-ahead bias — </a:t>
-            </a:r>
-            <a:r>
-              <a:rPr sz="1500" b="0" i="0">
+              <a:rPr sz="1200" b="0" i="0">
                 <a:solidFill>
                   <a:srgbClr val="1A1A1A"/>
                 </a:solidFill>
-                <a:latin typeface="Arial"/>
-              </a:rPr>
-              <a:t>using information not available at decision time</a:t>
+                <a:latin typeface="Consolas"/>
+              </a:rPr>
+              <a:t>    coincall_eth_options_l2_2025Q4.parquet / ..._trades_...</a:t>
             </a:r>
           </a:p>
           <a:p>
             <a:pPr>
               <a:spcAft>
-                <a:spcPts val="700"/>
+                <a:spcPts val="500"/>
               </a:spcAft>
             </a:pPr>
             <a:r>
-              <a:rPr sz="1500" b="1" i="0">
-                <a:solidFill>
-                  <a:srgbClr val="CC0000"/>
-                </a:solidFill>
-                <a:latin typeface="Arial"/>
-              </a:rPr>
-              <a:t>Sharpe ratio — </a:t>
-            </a:r>
-            <a:r>
-              <a:rPr sz="1500" b="0" i="0">
+              <a:rPr sz="1200" b="0" i="0">
                 <a:solidFill>
                   <a:srgbClr val="1A1A1A"/>
                 </a:solidFill>
-                <a:latin typeface="Arial"/>
-              </a:rPr>
-              <a:t>risk-adjusted return: annualized mean over standard deviation</a:t>
+                <a:latin typeface="Consolas"/>
+              </a:rPr>
+              <a:t>    coincall_btc_eth_perp_l2_2025Q4.parquet ; coincall_funding_rates_...</a:t>
             </a:r>
           </a:p>
           <a:p>
             <a:pPr>
               <a:spcAft>
-                <a:spcPts val="700"/>
+                <a:spcPts val="500"/>
               </a:spcAft>
             </a:pPr>
             <a:r>
-              <a:rPr sz="1500" b="1" i="0">
-                <a:solidFill>
-                  <a:srgbClr val="CC0000"/>
+              <a:rPr sz="1200" b="0" i="0">
+                <a:solidFill>
+                  <a:srgbClr val="1A1A1A"/>
                 </a:solidFill>
                 <a:latin typeface="Arial"/>
               </a:rPr>
-              <a:t>Block bootstrap — </a:t>
-            </a:r>
-            <a:r>
-              <a:rPr sz="1500" b="0" i="0">
-                <a:solidFill>
-                  <a:srgbClr val="1A1A1A"/>
-                </a:solidFill>
-                <a:latin typeface="Arial"/>
-              </a:rPr>
-              <a:t>resampling blocks of returns for a CI that keeps autocorrelation</a:t>
+              <a:t>•  Klines for regime context: GET /open/option/market/kline/history/v1/{name}?period=h1</a:t>
             </a:r>
           </a:p>
           <a:p>
             <a:pPr>
               <a:spcAft>
-                <a:spcPts val="700"/>
+                <a:spcPts val="500"/>
               </a:spcAft>
             </a:pPr>
             <a:r>
-              <a:rPr sz="1500" b="1" i="0">
-                <a:solidFill>
-                  <a:srgbClr val="CC0000"/>
+              <a:rPr sz="1200" b="0" i="0">
+                <a:solidFill>
+                  <a:srgbClr val="1A1A1A"/>
                 </a:solidFill>
                 <a:latin typeface="Arial"/>
               </a:rPr>
-              <a:t>Maximum drawdown — </a:t>
-            </a:r>
-            <a:r>
-              <a:rPr sz="1500" b="0" i="0">
+              <a:t>•  Trade tape carries mark IV at trade -&gt; calibrate the fill simulator</a:t>
+            </a:r>
+          </a:p>
+        </p:txBody>
+      </p:sp>
+    </p:spTree>
+  </p:cSld>
+  <p:clrMapOvr>
+    <a:masterClrMapping/>
+  </p:clrMapOvr>
+</p:sld>
+</file>
+
+<file path=ppt/slides/slide9.xml><?xml version="1.0" encoding="utf-8"?>
+<p:sld xmlns:a="http://schemas.openxmlformats.org/drawingml/2006/main" xmlns:p="http://schemas.openxmlformats.org/presentationml/2006/main" xmlns:r="http://schemas.openxmlformats.org/officeDocument/2006/relationships">
+  <p:cSld>
+    <p:spTree>
+      <p:nvGrpSpPr>
+        <p:cNvPr id="1" name=""/>
+        <p:cNvGrpSpPr/>
+        <p:nvPr/>
+      </p:nvGrpSpPr>
+      <p:grpSpPr/>
+      <p:sp>
+        <p:nvSpPr>
+          <p:cNvPr id="2" name="TextBox 1"/>
+          <p:cNvSpPr txBox="1"/>
+          <p:nvPr/>
+        </p:nvSpPr>
+        <p:spPr>
+          <a:xfrm>
+            <a:off x="457200" y="365760"/>
+            <a:ext cx="11247120" cy="640080"/>
+          </a:xfrm>
+          <a:prstGeom prst="rect">
+            <a:avLst/>
+          </a:prstGeom>
+          <a:noFill/>
+        </p:spPr>
+        <p:txBody>
+          <a:bodyPr wrap="none">
+            <a:spAutoFit/>
+          </a:bodyPr>
+          <a:lstStyle/>
+          <a:p>
+            <a:r>
+              <a:rPr sz="1800" b="1" i="0">
+                <a:solidFill>
+                  <a:srgbClr val="990000"/>
+                </a:solidFill>
+                <a:latin typeface="Arial"/>
+              </a:rPr>
+              <a:t>Code — week9_attribution.py -- P&amp;L attribution + bootstrap Sharpe</a:t>
+            </a:r>
+          </a:p>
+        </p:txBody>
+      </p:sp>
+      <p:sp>
+        <p:nvSpPr>
+          <p:cNvPr id="3" name="Rectangle 2"/>
+          <p:cNvSpPr/>
+          <p:nvPr/>
+        </p:nvSpPr>
+        <p:spPr>
+          <a:xfrm>
+            <a:off x="457200" y="1097280"/>
+            <a:ext cx="11247120" cy="5394960"/>
+          </a:xfrm>
+          <a:prstGeom prst="rect">
+            <a:avLst/>
+          </a:prstGeom>
+          <a:solidFill>
+            <a:srgbClr val="F5F5F5"/>
+          </a:solidFill>
+          <a:ln w="9525">
+            <a:solidFill>
+              <a:srgbClr val="6D6D6D"/>
+            </a:solidFill>
+          </a:ln>
+        </p:spPr>
+        <p:style>
+          <a:lnRef idx="1">
+            <a:schemeClr val="accent1"/>
+          </a:lnRef>
+          <a:fillRef idx="3">
+            <a:schemeClr val="accent1"/>
+          </a:fillRef>
+          <a:effectRef idx="2">
+            <a:schemeClr val="accent1"/>
+          </a:effectRef>
+          <a:fontRef idx="minor">
+            <a:schemeClr val="lt1"/>
+          </a:fontRef>
+        </p:style>
+        <p:txBody>
+          <a:bodyPr rtlCol="0" anchor="ctr" wrap="square" lIns="182880" tIns="91440"/>
+          <a:lstStyle/>
+          <a:p>
+            <a:pPr algn="ctr">
+              <a:spcAft>
+                <a:spcPts val="0"/>
+              </a:spcAft>
+            </a:pPr>
+            <a:r>
+              <a:rPr sz="1100" b="0" i="0">
                 <a:solidFill>
                   <a:srgbClr val="1A1A1A"/>
                 </a:solidFill>
-                <a:latin typeface="Arial"/>
-              </a:rPr>
-              <a:t>the largest peak-to-trough decline in equity</a:t>
+                <a:latin typeface="Consolas"/>
+              </a:rPr>
+              <a:t>import numpy as np</a:t>
             </a:r>
           </a:p>
           <a:p>
             <a:pPr>
               <a:spcAft>
-                <a:spcPts val="700"/>
+                <a:spcPts val="0"/>
               </a:spcAft>
             </a:pPr>
             <a:r>
-              <a:rPr sz="1500" b="1" i="0">
-                <a:solidFill>
-                  <a:srgbClr val="CC0000"/>
-                </a:solidFill>
-                <a:latin typeface="Arial"/>
-              </a:rPr>
-              <a:t>Taker strategy — </a:t>
-            </a:r>
-            <a:r>
-              <a:rPr sz="1500" b="0" i="0">
+              <a:rPr sz="1100" b="0" i="0">
                 <a:solidFill>
                   <a:srgbClr val="1A1A1A"/>
                 </a:solidFill>
-                <a:latin typeface="Arial"/>
-              </a:rPr>
-              <a:t>aggressive, spread-crossing execution</a:t>
+                <a:latin typeface="Consolas"/>
+              </a:rPr>
+              <a:t>def attribute(spread, inventory, gamma, hedging):</a:t>
+            </a:r>
+          </a:p>
+          <a:p>
+            <a:pPr>
+              <a:spcAft>
+                <a:spcPts val="0"/>
+              </a:spcAft>
+            </a:pPr>
+            <a:r>
+              <a:rPr sz="1100" b="0" i="0">
+                <a:solidFill>
+                  <a:srgbClr val="1A1A1A"/>
+                </a:solidFill>
+                <a:latin typeface="Consolas"/>
+              </a:rPr>
+              <a:t>    total = spread + inventory + gamma + hedging</a:t>
+            </a:r>
+          </a:p>
+          <a:p>
+            <a:pPr>
+              <a:spcAft>
+                <a:spcPts val="0"/>
+              </a:spcAft>
+            </a:pPr>
+            <a:r>
+              <a:rPr sz="1100" b="0" i="0">
+                <a:solidFill>
+                  <a:srgbClr val="1A1A1A"/>
+                </a:solidFill>
+                <a:latin typeface="Consolas"/>
+              </a:rPr>
+              <a:t>    assert abs(total.sum() - (spread.sum()+inventory.sum()</a:t>
+            </a:r>
+          </a:p>
+          <a:p>
+            <a:pPr>
+              <a:spcAft>
+                <a:spcPts val="0"/>
+              </a:spcAft>
+            </a:pPr>
+            <a:r>
+              <a:rPr sz="1100" b="0" i="0">
+                <a:solidFill>
+                  <a:srgbClr val="1A1A1A"/>
+                </a:solidFill>
+                <a:latin typeface="Consolas"/>
+              </a:rPr>
+              <a:t>               +gamma.sum()+hedging.sum())) &lt; 1e-6           # must sum to total</a:t>
+            </a:r>
+          </a:p>
+          <a:p>
+            <a:pPr>
+              <a:spcAft>
+                <a:spcPts val="0"/>
+              </a:spcAft>
+            </a:pPr>
+            <a:r>
+              <a:rPr sz="1100" b="0" i="0">
+                <a:solidFill>
+                  <a:srgbClr val="1A1A1A"/>
+                </a:solidFill>
+                <a:latin typeface="Consolas"/>
+              </a:rPr>
+              <a:t>    return dict(spread=spread, inventory=inventory, gamma=gamma,</a:t>
+            </a:r>
+          </a:p>
+          <a:p>
+            <a:pPr>
+              <a:spcAft>
+                <a:spcPts val="0"/>
+              </a:spcAft>
+            </a:pPr>
+            <a:r>
+              <a:rPr sz="1100" b="0" i="0">
+                <a:solidFill>
+                  <a:srgbClr val="1A1A1A"/>
+                </a:solidFill>
+                <a:latin typeface="Consolas"/>
+              </a:rPr>
+              <a:t>                hedging=hedging, total=total)</a:t>
+            </a:r>
+          </a:p>
+          <a:p>
+            <a:pPr>
+              <a:spcAft>
+                <a:spcPts val="0"/>
+              </a:spcAft>
+            </a:pPr>
+            <a:r>
+              <a:rPr sz="1100" b="0" i="0">
+                <a:solidFill>
+                  <a:srgbClr val="1A1A1A"/>
+                </a:solidFill>
+                <a:latin typeface="Consolas"/>
+              </a:rPr>
+              <a:t> </a:t>
+            </a:r>
+          </a:p>
+          <a:p>
+            <a:pPr>
+              <a:spcAft>
+                <a:spcPts val="0"/>
+              </a:spcAft>
+            </a:pPr>
+            <a:r>
+              <a:rPr sz="1100" b="0" i="0">
+                <a:solidFill>
+                  <a:srgbClr val="1A1A1A"/>
+                </a:solidFill>
+                <a:latin typeface="Consolas"/>
+              </a:rPr>
+              <a:t>def bootstrap_sharpe(r, block=5, n=2000, seed=0):</a:t>
+            </a:r>
+          </a:p>
+          <a:p>
+            <a:pPr>
+              <a:spcAft>
+                <a:spcPts val="0"/>
+              </a:spcAft>
+            </a:pPr>
+            <a:r>
+              <a:rPr sz="1100" b="0" i="0">
+                <a:solidFill>
+                  <a:srgbClr val="1A1A1A"/>
+                </a:solidFill>
+                <a:latin typeface="Consolas"/>
+              </a:rPr>
+              <a:t>    rng = np.random.default_rng(seed); T = len(r); out = []</a:t>
+            </a:r>
+          </a:p>
+          <a:p>
+            <a:pPr>
+              <a:spcAft>
+                <a:spcPts val="0"/>
+              </a:spcAft>
+            </a:pPr>
+            <a:r>
+              <a:rPr sz="1100" b="0" i="0">
+                <a:solidFill>
+                  <a:srgbClr val="1A1A1A"/>
+                </a:solidFill>
+                <a:latin typeface="Consolas"/>
+              </a:rPr>
+              <a:t>    for _ in range(n):</a:t>
+            </a:r>
+          </a:p>
+          <a:p>
+            <a:pPr>
+              <a:spcAft>
+                <a:spcPts val="0"/>
+              </a:spcAft>
+            </a:pPr>
+            <a:r>
+              <a:rPr sz="1100" b="0" i="0">
+                <a:solidFill>
+                  <a:srgbClr val="1A1A1A"/>
+                </a:solidFill>
+                <a:latin typeface="Consolas"/>
+              </a:rPr>
+              <a:t>        idx = (rng.integers(0, T-block, T//block)[:,None] + np.arange(block)).ravel()</a:t>
+            </a:r>
+          </a:p>
+          <a:p>
+            <a:pPr>
+              <a:spcAft>
+                <a:spcPts val="0"/>
+              </a:spcAft>
+            </a:pPr>
+            <a:r>
+              <a:rPr sz="1100" b="0" i="0">
+                <a:solidFill>
+                  <a:srgbClr val="1A1A1A"/>
+                </a:solidFill>
+                <a:latin typeface="Consolas"/>
+              </a:rPr>
+              <a:t>        s = r[idx]; out.append(s.mean()/s.std()*np.sqrt(252))</a:t>
+            </a:r>
+          </a:p>
+          <a:p>
+            <a:pPr>
+              <a:spcAft>
+                <a:spcPts val="0"/>
+              </a:spcAft>
+            </a:pPr>
+            <a:r>
+              <a:rPr sz="1100" b="0" i="0">
+                <a:solidFill>
+                  <a:srgbClr val="1A1A1A"/>
+                </a:solidFill>
+                <a:latin typeface="Consolas"/>
+              </a:rPr>
+              <a:t>    return np.percentile(out, [2.5, 50, 97.5])               # CI for the Sharpe</a:t>
             </a:r>
           </a:p>
         </p:txBody>
